--- a/docs/images/features_scheme.pptx
+++ b/docs/images/features_scheme.pptx
@@ -6,6 +6,7 @@
   </p:sldMasterIdLst>
   <p:sldIdLst>
     <p:sldId id="257" r:id="rId2"/>
+    <p:sldId id="258" r:id="rId3"/>
   </p:sldIdLst>
   <p:sldSz cx="12192000" cy="6858000"/>
   <p:notesSz cx="6858000" cy="9144000"/>
@@ -104,6 +105,11 @@
       </a:defRPr>
     </a:lvl9pPr>
   </p:defaultTextStyle>
+  <p:extLst>
+    <p:ext uri="{EFAFB233-063F-42B5-8137-9DF3F51BA10A}">
+      <p15:sldGuideLst xmlns:p15="http://schemas.microsoft.com/office/powerpoint/2012/main"/>
+    </p:ext>
+  </p:extLst>
 </p:presentation>
 </file>
 
@@ -3299,10 +3305,10 @@
       </p:grpSpPr>
       <p:grpSp>
         <p:nvGrpSpPr>
-          <p:cNvPr id="45" name="Group 44">
+          <p:cNvPr id="20" name="Group 19">
             <a:extLst>
               <a:ext uri="{FF2B5EF4-FFF2-40B4-BE49-F238E27FC236}">
-                <a16:creationId xmlns:a16="http://schemas.microsoft.com/office/drawing/2014/main" id="{C83CB112-01C8-71ED-0C27-09EE305DF73A}"/>
+                <a16:creationId xmlns:a16="http://schemas.microsoft.com/office/drawing/2014/main" id="{297695A3-25CE-65AE-3634-D556E4DDC512}"/>
               </a:ext>
             </a:extLst>
           </p:cNvPr>
@@ -3311,10 +3317,10 @@
         </p:nvGrpSpPr>
         <p:grpSpPr>
           <a:xfrm>
-            <a:off x="1195081" y="236593"/>
-            <a:ext cx="8968747" cy="5722795"/>
-            <a:chOff x="1195081" y="236593"/>
-            <a:chExt cx="8968747" cy="5722795"/>
+            <a:off x="567815" y="236593"/>
+            <a:ext cx="10246809" cy="5722795"/>
+            <a:chOff x="567815" y="236593"/>
+            <a:chExt cx="10246809" cy="5722795"/>
           </a:xfrm>
         </p:grpSpPr>
         <p:sp>
@@ -3686,7 +3692,9 @@
               <a:avLst/>
             </a:prstGeom>
             <a:solidFill>
-              <a:srgbClr val="F6F9FB"/>
+              <a:schemeClr val="bg1">
+                <a:lumMod val="85000"/>
+              </a:schemeClr>
             </a:solidFill>
             <a:ln w="38100">
               <a:solidFill>
@@ -3954,7 +3962,9 @@
             <a:noFill/>
             <a:ln w="38100">
               <a:solidFill>
-                <a:srgbClr val="0C5753"/>
+                <a:schemeClr val="bg1">
+                  <a:lumMod val="75000"/>
+                </a:schemeClr>
               </a:solidFill>
               <a:headEnd type="triangle"/>
               <a:tailEnd type="none"/>
@@ -3984,7 +3994,9 @@
               <a:r>
                 <a:rPr lang="en-US">
                   <a:solidFill>
-                    <a:srgbClr val="0C5753"/>
+                    <a:schemeClr val="bg1">
+                      <a:lumMod val="65000"/>
+                    </a:schemeClr>
                   </a:solidFill>
                 </a:rPr>
                 <a:t>Alignment</a:t>
@@ -4055,6 +4067,7 @@
                           <a:solidFill>
                             <a:srgbClr val="0C5753"/>
                           </a:solidFill>
+                          <a:latin typeface="Cambria Math" panose="02040503050406030204" pitchFamily="18" charset="0"/>
                         </a:rPr>
                         <m:t>𝜋</m:t>
                       </m:r>
@@ -4626,11 +4639,2150 @@
             </a:fontRef>
           </p:style>
         </p:cxnSp>
+        <p:sp>
+          <p:nvSpPr>
+            <p:cNvPr id="2" name="Left Bracket 1">
+              <a:extLst>
+                <a:ext uri="{FF2B5EF4-FFF2-40B4-BE49-F238E27FC236}">
+                  <a16:creationId xmlns:a16="http://schemas.microsoft.com/office/drawing/2014/main" id="{779994F3-CE3E-0B5E-35CE-5B8419CA044F}"/>
+                </a:ext>
+              </a:extLst>
+            </p:cNvPr>
+            <p:cNvSpPr/>
+            <p:nvPr/>
+          </p:nvSpPr>
+          <p:spPr>
+            <a:xfrm>
+              <a:off x="2400299" y="1321298"/>
+              <a:ext cx="173343" cy="2064190"/>
+            </a:xfrm>
+            <a:prstGeom prst="leftBracket">
+              <a:avLst>
+                <a:gd name="adj" fmla="val 137471"/>
+              </a:avLst>
+            </a:prstGeom>
+            <a:ln w="19050">
+              <a:solidFill>
+                <a:schemeClr val="bg1">
+                  <a:lumMod val="75000"/>
+                </a:schemeClr>
+              </a:solidFill>
+            </a:ln>
+          </p:spPr>
+          <p:style>
+            <a:lnRef idx="2">
+              <a:schemeClr val="accent1"/>
+            </a:lnRef>
+            <a:fillRef idx="0">
+              <a:schemeClr val="accent1"/>
+            </a:fillRef>
+            <a:effectRef idx="1">
+              <a:schemeClr val="accent1"/>
+            </a:effectRef>
+            <a:fontRef idx="minor">
+              <a:schemeClr val="tx1"/>
+            </a:fontRef>
+          </p:style>
+          <p:txBody>
+            <a:bodyPr rtlCol="0" anchor="ctr"/>
+            <a:lstStyle/>
+            <a:p>
+              <a:pPr algn="ctr"/>
+              <a:endParaRPr lang="en-US"/>
+            </a:p>
+          </p:txBody>
+        </p:sp>
+        <p:sp>
+          <p:nvSpPr>
+            <p:cNvPr id="8" name="TextBox 7">
+              <a:extLst>
+                <a:ext uri="{FF2B5EF4-FFF2-40B4-BE49-F238E27FC236}">
+                  <a16:creationId xmlns:a16="http://schemas.microsoft.com/office/drawing/2014/main" id="{06724562-4A74-B8D6-CC39-C4BAFA62675A}"/>
+                </a:ext>
+              </a:extLst>
+            </p:cNvPr>
+            <p:cNvSpPr txBox="1"/>
+            <p:nvPr/>
+          </p:nvSpPr>
+          <p:spPr>
+            <a:xfrm rot="16200000">
+              <a:off x="1074447" y="2164270"/>
+              <a:ext cx="2201500" cy="369332"/>
+            </a:xfrm>
+            <a:prstGeom prst="rect">
+              <a:avLst/>
+            </a:prstGeom>
+            <a:noFill/>
+          </p:spPr>
+          <p:txBody>
+            <a:bodyPr wrap="none" rtlCol="0">
+              <a:spAutoFit/>
+            </a:bodyPr>
+            <a:lstStyle/>
+            <a:p>
+              <a:r>
+                <a:rPr lang="en-US">
+                  <a:solidFill>
+                    <a:schemeClr val="bg1">
+                      <a:lumMod val="65000"/>
+                    </a:schemeClr>
+                  </a:solidFill>
+                </a:rPr>
+                <a:t>Alignment Summary</a:t>
+              </a:r>
+            </a:p>
+          </p:txBody>
+        </p:sp>
+        <p:sp>
+          <p:nvSpPr>
+            <p:cNvPr id="10" name="Left Bracket 9">
+              <a:extLst>
+                <a:ext uri="{FF2B5EF4-FFF2-40B4-BE49-F238E27FC236}">
+                  <a16:creationId xmlns:a16="http://schemas.microsoft.com/office/drawing/2014/main" id="{599AA03E-8FFE-0834-FF1C-C53B1B29607B}"/>
+                </a:ext>
+              </a:extLst>
+            </p:cNvPr>
+            <p:cNvSpPr/>
+            <p:nvPr/>
+          </p:nvSpPr>
+          <p:spPr>
+            <a:xfrm>
+              <a:off x="939954" y="3895198"/>
+              <a:ext cx="173343" cy="2064190"/>
+            </a:xfrm>
+            <a:prstGeom prst="leftBracket">
+              <a:avLst>
+                <a:gd name="adj" fmla="val 137471"/>
+              </a:avLst>
+            </a:prstGeom>
+            <a:ln w="19050">
+              <a:solidFill>
+                <a:schemeClr val="bg1">
+                  <a:lumMod val="75000"/>
+                </a:schemeClr>
+              </a:solidFill>
+            </a:ln>
+          </p:spPr>
+          <p:style>
+            <a:lnRef idx="2">
+              <a:schemeClr val="accent1"/>
+            </a:lnRef>
+            <a:fillRef idx="0">
+              <a:schemeClr val="accent1"/>
+            </a:fillRef>
+            <a:effectRef idx="1">
+              <a:schemeClr val="accent1"/>
+            </a:effectRef>
+            <a:fontRef idx="minor">
+              <a:schemeClr val="tx1"/>
+            </a:fontRef>
+          </p:style>
+          <p:txBody>
+            <a:bodyPr rtlCol="0" anchor="ctr"/>
+            <a:lstStyle/>
+            <a:p>
+              <a:pPr algn="ctr"/>
+              <a:endParaRPr lang="en-US"/>
+            </a:p>
+          </p:txBody>
+        </p:sp>
+        <p:sp>
+          <p:nvSpPr>
+            <p:cNvPr id="11" name="TextBox 10">
+              <a:extLst>
+                <a:ext uri="{FF2B5EF4-FFF2-40B4-BE49-F238E27FC236}">
+                  <a16:creationId xmlns:a16="http://schemas.microsoft.com/office/drawing/2014/main" id="{D9233ABC-5BA2-C3BD-1079-469C47588D0F}"/>
+                </a:ext>
+              </a:extLst>
+            </p:cNvPr>
+            <p:cNvSpPr txBox="1"/>
+            <p:nvPr/>
+          </p:nvSpPr>
+          <p:spPr>
+            <a:xfrm rot="16200000">
+              <a:off x="60656" y="4728176"/>
+              <a:ext cx="1383649" cy="369332"/>
+            </a:xfrm>
+            <a:prstGeom prst="rect">
+              <a:avLst/>
+            </a:prstGeom>
+            <a:noFill/>
+          </p:spPr>
+          <p:txBody>
+            <a:bodyPr wrap="none" rtlCol="0">
+              <a:spAutoFit/>
+            </a:bodyPr>
+            <a:lstStyle/>
+            <a:p>
+              <a:pPr algn="ctr"/>
+              <a:r>
+                <a:rPr lang="en-US">
+                  <a:solidFill>
+                    <a:schemeClr val="bg1">
+                      <a:lumMod val="65000"/>
+                    </a:schemeClr>
+                  </a:solidFill>
+                </a:rPr>
+                <a:t>SNP-related</a:t>
+              </a:r>
+            </a:p>
+          </p:txBody>
+        </p:sp>
+        <p:sp>
+          <p:nvSpPr>
+            <p:cNvPr id="12" name="Left Bracket 11">
+              <a:extLst>
+                <a:ext uri="{FF2B5EF4-FFF2-40B4-BE49-F238E27FC236}">
+                  <a16:creationId xmlns:a16="http://schemas.microsoft.com/office/drawing/2014/main" id="{B4E01A54-3290-CA7E-A5AE-7F694B63BAA2}"/>
+                </a:ext>
+              </a:extLst>
+            </p:cNvPr>
+            <p:cNvSpPr/>
+            <p:nvPr/>
+          </p:nvSpPr>
+          <p:spPr>
+            <a:xfrm flipH="1">
+              <a:off x="10269145" y="3677604"/>
+              <a:ext cx="173343" cy="2281784"/>
+            </a:xfrm>
+            <a:prstGeom prst="leftBracket">
+              <a:avLst>
+                <a:gd name="adj" fmla="val 137471"/>
+              </a:avLst>
+            </a:prstGeom>
+            <a:ln w="19050">
+              <a:solidFill>
+                <a:schemeClr val="bg1">
+                  <a:lumMod val="75000"/>
+                </a:schemeClr>
+              </a:solidFill>
+            </a:ln>
+          </p:spPr>
+          <p:style>
+            <a:lnRef idx="2">
+              <a:schemeClr val="accent1"/>
+            </a:lnRef>
+            <a:fillRef idx="0">
+              <a:schemeClr val="accent1"/>
+            </a:fillRef>
+            <a:effectRef idx="1">
+              <a:schemeClr val="accent1"/>
+            </a:effectRef>
+            <a:fontRef idx="minor">
+              <a:schemeClr val="tx1"/>
+            </a:fontRef>
+          </p:style>
+          <p:txBody>
+            <a:bodyPr rtlCol="0" anchor="ctr"/>
+            <a:lstStyle/>
+            <a:p>
+              <a:pPr algn="ctr"/>
+              <a:endParaRPr lang="en-US"/>
+            </a:p>
+          </p:txBody>
+        </p:sp>
+        <p:sp>
+          <p:nvSpPr>
+            <p:cNvPr id="13" name="TextBox 12">
+              <a:extLst>
+                <a:ext uri="{FF2B5EF4-FFF2-40B4-BE49-F238E27FC236}">
+                  <a16:creationId xmlns:a16="http://schemas.microsoft.com/office/drawing/2014/main" id="{7704E2C2-6882-E886-B360-85E0B3332FCB}"/>
+                </a:ext>
+              </a:extLst>
+            </p:cNvPr>
+            <p:cNvSpPr txBox="1"/>
+            <p:nvPr/>
+          </p:nvSpPr>
+          <p:spPr>
+            <a:xfrm rot="5400000" flipH="1">
+              <a:off x="10021426" y="4617856"/>
+              <a:ext cx="1217064" cy="369332"/>
+            </a:xfrm>
+            <a:prstGeom prst="rect">
+              <a:avLst/>
+            </a:prstGeom>
+            <a:noFill/>
+          </p:spPr>
+          <p:txBody>
+            <a:bodyPr wrap="none" rtlCol="0">
+              <a:spAutoFit/>
+            </a:bodyPr>
+            <a:lstStyle/>
+            <a:p>
+              <a:pPr algn="ctr"/>
+              <a:r>
+                <a:rPr lang="en-US">
+                  <a:solidFill>
+                    <a:schemeClr val="bg1">
+                      <a:lumMod val="65000"/>
+                    </a:schemeClr>
+                  </a:solidFill>
+                </a:rPr>
+                <a:t>SV-related</a:t>
+              </a:r>
+            </a:p>
+          </p:txBody>
+        </p:sp>
+        <p:sp>
+          <p:nvSpPr>
+            <p:cNvPr id="18" name="Left Bracket 17">
+              <a:extLst>
+                <a:ext uri="{FF2B5EF4-FFF2-40B4-BE49-F238E27FC236}">
+                  <a16:creationId xmlns:a16="http://schemas.microsoft.com/office/drawing/2014/main" id="{46BCD857-8DAA-8133-2D99-032BB47CA49F}"/>
+                </a:ext>
+              </a:extLst>
+            </p:cNvPr>
+            <p:cNvSpPr/>
+            <p:nvPr/>
+          </p:nvSpPr>
+          <p:spPr>
+            <a:xfrm flipH="1">
+              <a:off x="9585817" y="1321299"/>
+              <a:ext cx="173343" cy="777240"/>
+            </a:xfrm>
+            <a:prstGeom prst="leftBracket">
+              <a:avLst>
+                <a:gd name="adj" fmla="val 137471"/>
+              </a:avLst>
+            </a:prstGeom>
+            <a:ln w="19050">
+              <a:solidFill>
+                <a:schemeClr val="bg1">
+                  <a:lumMod val="75000"/>
+                </a:schemeClr>
+              </a:solidFill>
+            </a:ln>
+          </p:spPr>
+          <p:style>
+            <a:lnRef idx="2">
+              <a:schemeClr val="accent1"/>
+            </a:lnRef>
+            <a:fillRef idx="0">
+              <a:schemeClr val="accent1"/>
+            </a:fillRef>
+            <a:effectRef idx="1">
+              <a:schemeClr val="accent1"/>
+            </a:effectRef>
+            <a:fontRef idx="minor">
+              <a:schemeClr val="tx1"/>
+            </a:fontRef>
+          </p:style>
+          <p:txBody>
+            <a:bodyPr rtlCol="0" anchor="ctr"/>
+            <a:lstStyle/>
+            <a:p>
+              <a:pPr algn="ctr"/>
+              <a:endParaRPr lang="en-US"/>
+            </a:p>
+          </p:txBody>
+        </p:sp>
+        <p:sp>
+          <p:nvSpPr>
+            <p:cNvPr id="19" name="TextBox 18">
+              <a:extLst>
+                <a:ext uri="{FF2B5EF4-FFF2-40B4-BE49-F238E27FC236}">
+                  <a16:creationId xmlns:a16="http://schemas.microsoft.com/office/drawing/2014/main" id="{814A4F65-AB47-83A2-FFD4-08E10E75DC88}"/>
+                </a:ext>
+              </a:extLst>
+            </p:cNvPr>
+            <p:cNvSpPr txBox="1"/>
+            <p:nvPr/>
+          </p:nvSpPr>
+          <p:spPr>
+            <a:xfrm rot="5400000" flipH="1">
+              <a:off x="9528487" y="1512467"/>
+              <a:ext cx="830677" cy="369332"/>
+            </a:xfrm>
+            <a:prstGeom prst="rect">
+              <a:avLst/>
+            </a:prstGeom>
+            <a:noFill/>
+          </p:spPr>
+          <p:txBody>
+            <a:bodyPr wrap="none" rtlCol="0">
+              <a:spAutoFit/>
+            </a:bodyPr>
+            <a:lstStyle/>
+            <a:p>
+              <a:pPr algn="ctr"/>
+              <a:r>
+                <a:rPr lang="en-US">
+                  <a:solidFill>
+                    <a:schemeClr val="bg1">
+                      <a:lumMod val="65000"/>
+                    </a:schemeClr>
+                  </a:solidFill>
+                </a:rPr>
+                <a:t>Genes</a:t>
+              </a:r>
+            </a:p>
+          </p:txBody>
+        </p:sp>
       </p:grpSp>
     </p:spTree>
     <p:extLst>
       <p:ext uri="{BB962C8B-B14F-4D97-AF65-F5344CB8AC3E}">
         <p14:creationId xmlns:p14="http://schemas.microsoft.com/office/powerpoint/2010/main" val="3451422789"/>
+      </p:ext>
+    </p:extLst>
+  </p:cSld>
+  <p:clrMapOvr>
+    <a:masterClrMapping/>
+  </p:clrMapOvr>
+</p:sld>
+</file>
+
+<file path=ppt/slides/slide2.xml><?xml version="1.0" encoding="utf-8"?>
+<p:sld xmlns:a="http://schemas.openxmlformats.org/drawingml/2006/main" xmlns:r="http://schemas.openxmlformats.org/officeDocument/2006/relationships" xmlns:p="http://schemas.openxmlformats.org/presentationml/2006/main">
+  <p:cSld>
+    <p:spTree>
+      <p:nvGrpSpPr>
+        <p:cNvPr id="1" name="">
+          <a:extLst>
+            <a:ext uri="{FF2B5EF4-FFF2-40B4-BE49-F238E27FC236}">
+              <a16:creationId xmlns:a16="http://schemas.microsoft.com/office/drawing/2014/main" id="{051ECCB9-7F0C-5BC9-5744-48123DEA2675}"/>
+            </a:ext>
+          </a:extLst>
+        </p:cNvPr>
+        <p:cNvGrpSpPr/>
+        <p:nvPr/>
+      </p:nvGrpSpPr>
+      <p:grpSpPr>
+        <a:xfrm>
+          <a:off x="0" y="0"/>
+          <a:ext cx="0" cy="0"/>
+          <a:chOff x="0" y="0"/>
+          <a:chExt cx="0" cy="0"/>
+        </a:xfrm>
+      </p:grpSpPr>
+      <p:grpSp>
+        <p:nvGrpSpPr>
+          <p:cNvPr id="20" name="Group 19">
+            <a:extLst>
+              <a:ext uri="{FF2B5EF4-FFF2-40B4-BE49-F238E27FC236}">
+                <a16:creationId xmlns:a16="http://schemas.microsoft.com/office/drawing/2014/main" id="{77CB19BB-C5F9-4ACF-1BFA-5A54811B8542}"/>
+              </a:ext>
+            </a:extLst>
+          </p:cNvPr>
+          <p:cNvGrpSpPr/>
+          <p:nvPr/>
+        </p:nvGrpSpPr>
+        <p:grpSpPr>
+          <a:xfrm>
+            <a:off x="522290" y="236593"/>
+            <a:ext cx="10521089" cy="5722795"/>
+            <a:chOff x="522290" y="236593"/>
+            <a:chExt cx="10521089" cy="5722795"/>
+          </a:xfrm>
+        </p:grpSpPr>
+        <p:sp>
+          <p:nvSpPr>
+            <p:cNvPr id="3" name="Rounded Rectangle 2">
+              <a:extLst>
+                <a:ext uri="{FF2B5EF4-FFF2-40B4-BE49-F238E27FC236}">
+                  <a16:creationId xmlns:a16="http://schemas.microsoft.com/office/drawing/2014/main" id="{B3082F97-5C8B-9360-958D-6EFD89306980}"/>
+                </a:ext>
+              </a:extLst>
+            </p:cNvPr>
+            <p:cNvSpPr/>
+            <p:nvPr/>
+          </p:nvSpPr>
+          <p:spPr>
+            <a:xfrm>
+              <a:off x="2948915" y="1321298"/>
+              <a:ext cx="2651760" cy="777240"/>
+            </a:xfrm>
+            <a:prstGeom prst="roundRect">
+              <a:avLst/>
+            </a:prstGeom>
+            <a:solidFill>
+              <a:srgbClr val="F6F9FB"/>
+            </a:solidFill>
+            <a:ln w="38100">
+              <a:solidFill>
+                <a:srgbClr val="0C5753"/>
+              </a:solidFill>
+              <a:headEnd type="triangle"/>
+              <a:tailEnd type="none"/>
+            </a:ln>
+          </p:spPr>
+          <p:style>
+            <a:lnRef idx="2">
+              <a:schemeClr val="accent1">
+                <a:shade val="15000"/>
+              </a:schemeClr>
+            </a:lnRef>
+            <a:fillRef idx="1">
+              <a:schemeClr val="accent1"/>
+            </a:fillRef>
+            <a:effectRef idx="0">
+              <a:schemeClr val="accent1"/>
+            </a:effectRef>
+            <a:fontRef idx="minor">
+              <a:schemeClr val="lt1"/>
+            </a:fontRef>
+          </p:style>
+          <p:txBody>
+            <a:bodyPr rtlCol="0" anchor="ctr"/>
+            <a:lstStyle/>
+            <a:p>
+              <a:pPr algn="ctr"/>
+              <a:r>
+                <a:rPr lang="en-US">
+                  <a:solidFill>
+                    <a:srgbClr val="0C5753"/>
+                  </a:solidFill>
+                </a:rPr>
+                <a:t>Pangenome Synteny</a:t>
+              </a:r>
+            </a:p>
+            <a:p>
+              <a:pPr algn="ctr"/>
+              <a:r>
+                <a:rPr lang="ru-RU">
+                  <a:solidFill>
+                    <a:srgbClr val="0C5753"/>
+                  </a:solidFill>
+                  <a:latin typeface="Courier New" panose="02070309020205020404" pitchFamily="49" charset="0"/>
+                  <a:cs typeface="Courier New" panose="02070309020205020404" pitchFamily="49" charset="0"/>
+                </a:rPr>
+                <a:t>-</a:t>
+              </a:r>
+              <a:r>
+                <a:rPr lang="en-US">
+                  <a:solidFill>
+                    <a:srgbClr val="0C5753"/>
+                  </a:solidFill>
+                  <a:latin typeface="Courier New" panose="02070309020205020404" pitchFamily="49" charset="0"/>
+                  <a:cs typeface="Courier New" panose="02070309020205020404" pitchFamily="49" charset="0"/>
+                </a:rPr>
+                <a:t>synteny</a:t>
+              </a:r>
+            </a:p>
+          </p:txBody>
+        </p:sp>
+        <p:sp>
+          <p:nvSpPr>
+            <p:cNvPr id="4" name="Rounded Rectangle 3">
+              <a:extLst>
+                <a:ext uri="{FF2B5EF4-FFF2-40B4-BE49-F238E27FC236}">
+                  <a16:creationId xmlns:a16="http://schemas.microsoft.com/office/drawing/2014/main" id="{EC42A71C-E12A-0448-B3B8-B5F0C2375BC2}"/>
+                </a:ext>
+              </a:extLst>
+            </p:cNvPr>
+            <p:cNvSpPr/>
+            <p:nvPr/>
+          </p:nvSpPr>
+          <p:spPr>
+            <a:xfrm>
+              <a:off x="2948915" y="2608248"/>
+              <a:ext cx="2651760" cy="777240"/>
+            </a:xfrm>
+            <a:prstGeom prst="roundRect">
+              <a:avLst/>
+            </a:prstGeom>
+            <a:solidFill>
+              <a:srgbClr val="F6F9FB"/>
+            </a:solidFill>
+            <a:ln w="38100">
+              <a:solidFill>
+                <a:srgbClr val="0C5753"/>
+              </a:solidFill>
+              <a:headEnd type="triangle"/>
+              <a:tailEnd type="none"/>
+            </a:ln>
+          </p:spPr>
+          <p:style>
+            <a:lnRef idx="2">
+              <a:schemeClr val="accent1">
+                <a:shade val="15000"/>
+              </a:schemeClr>
+            </a:lnRef>
+            <a:fillRef idx="1">
+              <a:schemeClr val="accent1"/>
+            </a:fillRef>
+            <a:effectRef idx="0">
+              <a:schemeClr val="accent1"/>
+            </a:effectRef>
+            <a:fontRef idx="minor">
+              <a:schemeClr val="lt1"/>
+            </a:fontRef>
+          </p:style>
+          <p:txBody>
+            <a:bodyPr rtlCol="0" anchor="ctr"/>
+            <a:lstStyle/>
+            <a:p>
+              <a:pPr algn="ctr"/>
+              <a:r>
+                <a:rPr lang="en-US">
+                  <a:solidFill>
+                    <a:srgbClr val="0C5753"/>
+                  </a:solidFill>
+                </a:rPr>
+                <a:t>Consensus Sequences</a:t>
+              </a:r>
+            </a:p>
+            <a:p>
+              <a:pPr algn="ctr"/>
+              <a:r>
+                <a:rPr lang="ru-RU">
+                  <a:solidFill>
+                    <a:srgbClr val="0C5753"/>
+                  </a:solidFill>
+                  <a:latin typeface="Courier New" panose="02070309020205020404" pitchFamily="49" charset="0"/>
+                  <a:cs typeface="Courier New" panose="02070309020205020404" pitchFamily="49" charset="0"/>
+                </a:rPr>
+                <a:t>-</a:t>
+              </a:r>
+              <a:r>
+                <a:rPr lang="en-US">
+                  <a:solidFill>
+                    <a:srgbClr val="0C5753"/>
+                  </a:solidFill>
+                  <a:latin typeface="Courier New" panose="02070309020205020404" pitchFamily="49" charset="0"/>
+                  <a:cs typeface="Courier New" panose="02070309020205020404" pitchFamily="49" charset="0"/>
+                </a:rPr>
+                <a:t>consensus</a:t>
+              </a:r>
+            </a:p>
+          </p:txBody>
+        </p:sp>
+        <p:sp>
+          <p:nvSpPr>
+            <p:cNvPr id="5" name="Rounded Rectangle 4">
+              <a:extLst>
+                <a:ext uri="{FF2B5EF4-FFF2-40B4-BE49-F238E27FC236}">
+                  <a16:creationId xmlns:a16="http://schemas.microsoft.com/office/drawing/2014/main" id="{BA9D80C1-0F4D-724A-BBBE-FBC1671193DB}"/>
+                </a:ext>
+              </a:extLst>
+            </p:cNvPr>
+            <p:cNvSpPr/>
+            <p:nvPr/>
+          </p:nvSpPr>
+          <p:spPr>
+            <a:xfrm>
+              <a:off x="2028172" y="3895198"/>
+              <a:ext cx="1645920" cy="777240"/>
+            </a:xfrm>
+            <a:prstGeom prst="roundRect">
+              <a:avLst/>
+            </a:prstGeom>
+            <a:solidFill>
+              <a:srgbClr val="00B050">
+                <a:alpha val="20000"/>
+              </a:srgbClr>
+            </a:solidFill>
+            <a:ln w="38100">
+              <a:solidFill>
+                <a:srgbClr val="0C5753"/>
+              </a:solidFill>
+              <a:headEnd type="triangle"/>
+              <a:tailEnd type="none"/>
+            </a:ln>
+          </p:spPr>
+          <p:style>
+            <a:lnRef idx="2">
+              <a:schemeClr val="accent1">
+                <a:shade val="15000"/>
+              </a:schemeClr>
+            </a:lnRef>
+            <a:fillRef idx="1">
+              <a:schemeClr val="accent1"/>
+            </a:fillRef>
+            <a:effectRef idx="0">
+              <a:schemeClr val="accent1"/>
+            </a:effectRef>
+            <a:fontRef idx="minor">
+              <a:schemeClr val="lt1"/>
+            </a:fontRef>
+          </p:style>
+          <p:txBody>
+            <a:bodyPr rtlCol="0" anchor="ctr"/>
+            <a:lstStyle/>
+            <a:p>
+              <a:pPr algn="ctr"/>
+              <a:r>
+                <a:rPr lang="en-US">
+                  <a:solidFill>
+                    <a:srgbClr val="0C5753"/>
+                  </a:solidFill>
+                </a:rPr>
+                <a:t>SNPs</a:t>
+              </a:r>
+            </a:p>
+            <a:p>
+              <a:pPr algn="ctr"/>
+              <a:r>
+                <a:rPr lang="ru-RU">
+                  <a:solidFill>
+                    <a:srgbClr val="0C5753"/>
+                  </a:solidFill>
+                  <a:latin typeface="Courier New" panose="02070309020205020404" pitchFamily="49" charset="0"/>
+                  <a:cs typeface="Courier New" panose="02070309020205020404" pitchFamily="49" charset="0"/>
+                </a:rPr>
+                <a:t>-</a:t>
+              </a:r>
+              <a:r>
+                <a:rPr lang="en-US">
+                  <a:solidFill>
+                    <a:srgbClr val="0C5753"/>
+                  </a:solidFill>
+                  <a:latin typeface="Courier New" panose="02070309020205020404" pitchFamily="49" charset="0"/>
+                  <a:cs typeface="Courier New" panose="02070309020205020404" pitchFamily="49" charset="0"/>
+                </a:rPr>
+                <a:t>snp</a:t>
+              </a:r>
+            </a:p>
+          </p:txBody>
+        </p:sp>
+        <p:sp>
+          <p:nvSpPr>
+            <p:cNvPr id="6" name="Rounded Rectangle 5">
+              <a:extLst>
+                <a:ext uri="{FF2B5EF4-FFF2-40B4-BE49-F238E27FC236}">
+                  <a16:creationId xmlns:a16="http://schemas.microsoft.com/office/drawing/2014/main" id="{D968B106-BD4B-3318-BF3E-FAB60D6F1D16}"/>
+                </a:ext>
+              </a:extLst>
+            </p:cNvPr>
+            <p:cNvSpPr/>
+            <p:nvPr/>
+          </p:nvSpPr>
+          <p:spPr>
+            <a:xfrm>
+              <a:off x="5273040" y="3895198"/>
+              <a:ext cx="1645920" cy="777240"/>
+            </a:xfrm>
+            <a:prstGeom prst="roundRect">
+              <a:avLst/>
+            </a:prstGeom>
+            <a:solidFill>
+              <a:srgbClr val="0C5753">
+                <a:alpha val="20000"/>
+              </a:srgbClr>
+            </a:solidFill>
+            <a:ln w="38100">
+              <a:solidFill>
+                <a:srgbClr val="0C5753"/>
+              </a:solidFill>
+              <a:headEnd type="triangle"/>
+              <a:tailEnd type="none"/>
+            </a:ln>
+          </p:spPr>
+          <p:style>
+            <a:lnRef idx="2">
+              <a:schemeClr val="accent1">
+                <a:shade val="15000"/>
+              </a:schemeClr>
+            </a:lnRef>
+            <a:fillRef idx="1">
+              <a:schemeClr val="accent1"/>
+            </a:fillRef>
+            <a:effectRef idx="0">
+              <a:schemeClr val="accent1"/>
+            </a:effectRef>
+            <a:fontRef idx="minor">
+              <a:schemeClr val="lt1"/>
+            </a:fontRef>
+          </p:style>
+          <p:txBody>
+            <a:bodyPr rtlCol="0" anchor="ctr"/>
+            <a:lstStyle/>
+            <a:p>
+              <a:pPr algn="ctr"/>
+              <a:r>
+                <a:rPr lang="en-US">
+                  <a:solidFill>
+                    <a:srgbClr val="0C5753"/>
+                  </a:solidFill>
+                </a:rPr>
+                <a:t>SVs</a:t>
+              </a:r>
+            </a:p>
+            <a:p>
+              <a:pPr algn="ctr"/>
+              <a:r>
+                <a:rPr lang="ru-RU">
+                  <a:solidFill>
+                    <a:srgbClr val="0C5753"/>
+                  </a:solidFill>
+                  <a:latin typeface="Courier New" panose="02070309020205020404" pitchFamily="49" charset="0"/>
+                  <a:cs typeface="Courier New" panose="02070309020205020404" pitchFamily="49" charset="0"/>
+                </a:rPr>
+                <a:t>-</a:t>
+              </a:r>
+              <a:r>
+                <a:rPr lang="en-US">
+                  <a:solidFill>
+                    <a:srgbClr val="0C5753"/>
+                  </a:solidFill>
+                  <a:latin typeface="Courier New" panose="02070309020205020404" pitchFamily="49" charset="0"/>
+                  <a:cs typeface="Courier New" panose="02070309020205020404" pitchFamily="49" charset="0"/>
+                </a:rPr>
+                <a:t>sv</a:t>
+              </a:r>
+            </a:p>
+          </p:txBody>
+        </p:sp>
+        <p:sp>
+          <p:nvSpPr>
+            <p:cNvPr id="7" name="Rounded Rectangle 6">
+              <a:extLst>
+                <a:ext uri="{FF2B5EF4-FFF2-40B4-BE49-F238E27FC236}">
+                  <a16:creationId xmlns:a16="http://schemas.microsoft.com/office/drawing/2014/main" id="{6C47B8A7-C48B-9793-7564-71682A09B893}"/>
+                </a:ext>
+              </a:extLst>
+            </p:cNvPr>
+            <p:cNvSpPr/>
+            <p:nvPr/>
+          </p:nvSpPr>
+          <p:spPr>
+            <a:xfrm>
+              <a:off x="6719514" y="1308513"/>
+              <a:ext cx="2651760" cy="777240"/>
+            </a:xfrm>
+            <a:prstGeom prst="roundRect">
+              <a:avLst/>
+            </a:prstGeom>
+            <a:solidFill>
+              <a:schemeClr val="bg1">
+                <a:lumMod val="85000"/>
+              </a:schemeClr>
+            </a:solidFill>
+            <a:ln w="38100">
+              <a:solidFill>
+                <a:srgbClr val="0C5753"/>
+              </a:solidFill>
+              <a:headEnd type="triangle"/>
+              <a:tailEnd type="none"/>
+            </a:ln>
+          </p:spPr>
+          <p:style>
+            <a:lnRef idx="2">
+              <a:schemeClr val="accent1">
+                <a:shade val="15000"/>
+              </a:schemeClr>
+            </a:lnRef>
+            <a:fillRef idx="1">
+              <a:schemeClr val="accent1"/>
+            </a:fillRef>
+            <a:effectRef idx="0">
+              <a:schemeClr val="accent1"/>
+            </a:effectRef>
+            <a:fontRef idx="minor">
+              <a:schemeClr val="lt1"/>
+            </a:fontRef>
+          </p:style>
+          <p:txBody>
+            <a:bodyPr rtlCol="0" anchor="ctr"/>
+            <a:lstStyle/>
+            <a:p>
+              <a:pPr algn="ctr"/>
+              <a:r>
+                <a:rPr lang="en-US">
+                  <a:solidFill>
+                    <a:srgbClr val="0C5753"/>
+                  </a:solidFill>
+                </a:rPr>
+                <a:t>Gene annotation</a:t>
+              </a:r>
+            </a:p>
+            <a:p>
+              <a:pPr algn="ctr"/>
+              <a:r>
+                <a:rPr lang="ru-RU">
+                  <a:solidFill>
+                    <a:srgbClr val="0C5753"/>
+                  </a:solidFill>
+                  <a:latin typeface="Courier New" panose="02070309020205020404" pitchFamily="49" charset="0"/>
+                  <a:cs typeface="Courier New" panose="02070309020205020404" pitchFamily="49" charset="0"/>
+                </a:rPr>
+                <a:t>-</a:t>
+              </a:r>
+              <a:r>
+                <a:rPr lang="en-US">
+                  <a:solidFill>
+                    <a:srgbClr val="0C5753"/>
+                  </a:solidFill>
+                  <a:latin typeface="Courier New" panose="02070309020205020404" pitchFamily="49" charset="0"/>
+                  <a:cs typeface="Courier New" panose="02070309020205020404" pitchFamily="49" charset="0"/>
+                </a:rPr>
+                <a:t>annogroup &lt;path&gt;</a:t>
+              </a:r>
+            </a:p>
+          </p:txBody>
+        </p:sp>
+        <p:cxnSp>
+          <p:nvCxnSpPr>
+            <p:cNvPr id="9" name="Straight Arrow Connector 8">
+              <a:extLst>
+                <a:ext uri="{FF2B5EF4-FFF2-40B4-BE49-F238E27FC236}">
+                  <a16:creationId xmlns:a16="http://schemas.microsoft.com/office/drawing/2014/main" id="{015C56D3-5A95-4983-7C1F-E1846BB01A2A}"/>
+                </a:ext>
+              </a:extLst>
+            </p:cNvPr>
+            <p:cNvCxnSpPr>
+              <a:cxnSpLocks/>
+            </p:cNvCxnSpPr>
+            <p:nvPr/>
+          </p:nvCxnSpPr>
+          <p:spPr>
+            <a:xfrm flipH="1">
+              <a:off x="4849941" y="906423"/>
+              <a:ext cx="182880" cy="320040"/>
+            </a:xfrm>
+            <a:prstGeom prst="straightConnector1">
+              <a:avLst/>
+            </a:prstGeom>
+            <a:ln w="38100">
+              <a:solidFill>
+                <a:srgbClr val="0C5753"/>
+              </a:solidFill>
+              <a:headEnd type="triangle"/>
+              <a:tailEnd type="none"/>
+            </a:ln>
+          </p:spPr>
+          <p:style>
+            <a:lnRef idx="2">
+              <a:schemeClr val="accent1"/>
+            </a:lnRef>
+            <a:fillRef idx="0">
+              <a:schemeClr val="accent1"/>
+            </a:fillRef>
+            <a:effectRef idx="1">
+              <a:schemeClr val="accent1"/>
+            </a:effectRef>
+            <a:fontRef idx="minor">
+              <a:schemeClr val="tx1"/>
+            </a:fontRef>
+          </p:style>
+        </p:cxnSp>
+        <p:cxnSp>
+          <p:nvCxnSpPr>
+            <p:cNvPr id="14" name="Straight Arrow Connector 13">
+              <a:extLst>
+                <a:ext uri="{FF2B5EF4-FFF2-40B4-BE49-F238E27FC236}">
+                  <a16:creationId xmlns:a16="http://schemas.microsoft.com/office/drawing/2014/main" id="{059498FA-5229-2F93-7EEB-1989B6DB7F3C}"/>
+                </a:ext>
+              </a:extLst>
+            </p:cNvPr>
+            <p:cNvCxnSpPr>
+              <a:cxnSpLocks/>
+            </p:cNvCxnSpPr>
+            <p:nvPr/>
+          </p:nvCxnSpPr>
+          <p:spPr>
+            <a:xfrm>
+              <a:off x="4152032" y="2188916"/>
+              <a:ext cx="0" cy="320040"/>
+            </a:xfrm>
+            <a:prstGeom prst="straightConnector1">
+              <a:avLst/>
+            </a:prstGeom>
+            <a:ln w="38100">
+              <a:solidFill>
+                <a:srgbClr val="0C5753"/>
+              </a:solidFill>
+              <a:headEnd type="triangle"/>
+              <a:tailEnd type="none"/>
+            </a:ln>
+          </p:spPr>
+          <p:style>
+            <a:lnRef idx="2">
+              <a:schemeClr val="accent1"/>
+            </a:lnRef>
+            <a:fillRef idx="0">
+              <a:schemeClr val="accent1"/>
+            </a:fillRef>
+            <a:effectRef idx="1">
+              <a:schemeClr val="accent1"/>
+            </a:effectRef>
+            <a:fontRef idx="minor">
+              <a:schemeClr val="tx1"/>
+            </a:fontRef>
+          </p:style>
+        </p:cxnSp>
+        <p:cxnSp>
+          <p:nvCxnSpPr>
+            <p:cNvPr id="17" name="Straight Arrow Connector 16">
+              <a:extLst>
+                <a:ext uri="{FF2B5EF4-FFF2-40B4-BE49-F238E27FC236}">
+                  <a16:creationId xmlns:a16="http://schemas.microsoft.com/office/drawing/2014/main" id="{A3E6A40E-5325-3A90-7A21-9825DC256175}"/>
+                </a:ext>
+              </a:extLst>
+            </p:cNvPr>
+            <p:cNvCxnSpPr>
+              <a:cxnSpLocks/>
+            </p:cNvCxnSpPr>
+            <p:nvPr/>
+          </p:nvCxnSpPr>
+          <p:spPr>
+            <a:xfrm flipH="1">
+              <a:off x="2929358" y="3495553"/>
+              <a:ext cx="182880" cy="320040"/>
+            </a:xfrm>
+            <a:prstGeom prst="straightConnector1">
+              <a:avLst/>
+            </a:prstGeom>
+            <a:ln w="38100">
+              <a:solidFill>
+                <a:srgbClr val="0C5753"/>
+              </a:solidFill>
+              <a:headEnd type="triangle"/>
+              <a:tailEnd type="none"/>
+            </a:ln>
+          </p:spPr>
+          <p:style>
+            <a:lnRef idx="2">
+              <a:schemeClr val="accent1"/>
+            </a:lnRef>
+            <a:fillRef idx="0">
+              <a:schemeClr val="accent1"/>
+            </a:fillRef>
+            <a:effectRef idx="1">
+              <a:schemeClr val="accent1"/>
+            </a:effectRef>
+            <a:fontRef idx="minor">
+              <a:schemeClr val="tx1"/>
+            </a:fontRef>
+          </p:style>
+        </p:cxnSp>
+        <p:cxnSp>
+          <p:nvCxnSpPr>
+            <p:cNvPr id="21" name="Straight Arrow Connector 20">
+              <a:extLst>
+                <a:ext uri="{FF2B5EF4-FFF2-40B4-BE49-F238E27FC236}">
+                  <a16:creationId xmlns:a16="http://schemas.microsoft.com/office/drawing/2014/main" id="{5ADB1358-4EA4-4BA7-B7D7-5856DCEA1374}"/>
+                </a:ext>
+              </a:extLst>
+            </p:cNvPr>
+            <p:cNvCxnSpPr>
+              <a:cxnSpLocks/>
+            </p:cNvCxnSpPr>
+            <p:nvPr/>
+          </p:nvCxnSpPr>
+          <p:spPr>
+            <a:xfrm>
+              <a:off x="5325512" y="3495553"/>
+              <a:ext cx="182880" cy="320040"/>
+            </a:xfrm>
+            <a:prstGeom prst="straightConnector1">
+              <a:avLst/>
+            </a:prstGeom>
+            <a:ln w="38100">
+              <a:solidFill>
+                <a:srgbClr val="0C5753"/>
+              </a:solidFill>
+              <a:headEnd type="triangle"/>
+              <a:tailEnd type="none"/>
+            </a:ln>
+          </p:spPr>
+          <p:style>
+            <a:lnRef idx="2">
+              <a:schemeClr val="accent1"/>
+            </a:lnRef>
+            <a:fillRef idx="0">
+              <a:schemeClr val="accent1"/>
+            </a:fillRef>
+            <a:effectRef idx="1">
+              <a:schemeClr val="accent1"/>
+            </a:effectRef>
+            <a:fontRef idx="minor">
+              <a:schemeClr val="tx1"/>
+            </a:fontRef>
+          </p:style>
+        </p:cxnSp>
+        <p:sp>
+          <p:nvSpPr>
+            <p:cNvPr id="28" name="Rounded Rectangle 27">
+              <a:extLst>
+                <a:ext uri="{FF2B5EF4-FFF2-40B4-BE49-F238E27FC236}">
+                  <a16:creationId xmlns:a16="http://schemas.microsoft.com/office/drawing/2014/main" id="{C6C65436-1AD3-C815-8A03-A3BE542E6642}"/>
+                </a:ext>
+              </a:extLst>
+            </p:cNvPr>
+            <p:cNvSpPr/>
+            <p:nvPr/>
+          </p:nvSpPr>
+          <p:spPr>
+            <a:xfrm>
+              <a:off x="4621341" y="236593"/>
+              <a:ext cx="2651760" cy="550279"/>
+            </a:xfrm>
+            <a:prstGeom prst="roundRect">
+              <a:avLst/>
+            </a:prstGeom>
+            <a:noFill/>
+            <a:ln w="38100">
+              <a:solidFill>
+                <a:schemeClr val="bg1">
+                  <a:lumMod val="75000"/>
+                </a:schemeClr>
+              </a:solidFill>
+              <a:headEnd type="triangle"/>
+              <a:tailEnd type="none"/>
+            </a:ln>
+          </p:spPr>
+          <p:style>
+            <a:lnRef idx="2">
+              <a:schemeClr val="accent1">
+                <a:shade val="15000"/>
+              </a:schemeClr>
+            </a:lnRef>
+            <a:fillRef idx="1">
+              <a:schemeClr val="accent1"/>
+            </a:fillRef>
+            <a:effectRef idx="0">
+              <a:schemeClr val="accent1"/>
+            </a:effectRef>
+            <a:fontRef idx="minor">
+              <a:schemeClr val="lt1"/>
+            </a:fontRef>
+          </p:style>
+          <p:txBody>
+            <a:bodyPr rtlCol="0" anchor="ctr"/>
+            <a:lstStyle/>
+            <a:p>
+              <a:pPr algn="ctr"/>
+              <a:r>
+                <a:rPr lang="en-US">
+                  <a:solidFill>
+                    <a:schemeClr val="bg1">
+                      <a:lumMod val="65000"/>
+                    </a:schemeClr>
+                  </a:solidFill>
+                </a:rPr>
+                <a:t>Alignment</a:t>
+              </a:r>
+            </a:p>
+          </p:txBody>
+        </p:sp>
+        <mc:AlternateContent xmlns:mc="http://schemas.openxmlformats.org/markup-compatibility/2006">
+          <mc:Choice xmlns:a14="http://schemas.microsoft.com/office/drawing/2010/main" Requires="a14">
+            <p:sp>
+              <p:nvSpPr>
+                <p:cNvPr id="35" name="Rounded Rectangle 34">
+                  <a:extLst>
+                    <a:ext uri="{FF2B5EF4-FFF2-40B4-BE49-F238E27FC236}">
+                      <a16:creationId xmlns:a16="http://schemas.microsoft.com/office/drawing/2014/main" id="{36D7D627-C4A2-68B8-AAEC-1800057753AB}"/>
+                    </a:ext>
+                  </a:extLst>
+                </p:cNvPr>
+                <p:cNvSpPr/>
+                <p:nvPr/>
+              </p:nvSpPr>
+              <p:spPr>
+                <a:xfrm>
+                  <a:off x="1195081" y="5182148"/>
+                  <a:ext cx="1645920" cy="777240"/>
+                </a:xfrm>
+                <a:prstGeom prst="roundRect">
+                  <a:avLst/>
+                </a:prstGeom>
+                <a:solidFill>
+                  <a:srgbClr val="00B050">
+                    <a:alpha val="20000"/>
+                  </a:srgbClr>
+                </a:solidFill>
+                <a:ln w="38100">
+                  <a:solidFill>
+                    <a:srgbClr val="0C5753"/>
+                  </a:solidFill>
+                  <a:headEnd type="triangle"/>
+                  <a:tailEnd type="none"/>
+                </a:ln>
+              </p:spPr>
+              <p:style>
+                <a:lnRef idx="2">
+                  <a:schemeClr val="accent1">
+                    <a:shade val="15000"/>
+                  </a:schemeClr>
+                </a:lnRef>
+                <a:fillRef idx="1">
+                  <a:schemeClr val="accent1"/>
+                </a:fillRef>
+                <a:effectRef idx="0">
+                  <a:schemeClr val="accent1"/>
+                </a:effectRef>
+                <a:fontRef idx="minor">
+                  <a:schemeClr val="lt1"/>
+                </a:fontRef>
+              </p:style>
+              <p:txBody>
+                <a:bodyPr rtlCol="0" anchor="ctr"/>
+                <a:lstStyle/>
+                <a:p>
+                  <a:pPr algn="ctr"/>
+                  <a14:m>
+                    <m:oMath xmlns:m="http://schemas.openxmlformats.org/officeDocument/2006/math">
+                      <m:r>
+                        <a:rPr lang="ru-RU">
+                          <a:solidFill>
+                            <a:srgbClr val="0C5753"/>
+                          </a:solidFill>
+                          <a:latin typeface="Cambria Math" panose="02040503050406030204" pitchFamily="18" charset="0"/>
+                        </a:rPr>
+                        <m:t>𝜋</m:t>
+                      </m:r>
+                    </m:oMath>
+                  </a14:m>
+                  <a:r>
+                    <a:rPr lang="en-US">
+                      <a:solidFill>
+                        <a:srgbClr val="0C5753"/>
+                      </a:solidFill>
+                    </a:rPr>
+                    <a:t>-diversity</a:t>
+                  </a:r>
+                </a:p>
+                <a:p>
+                  <a:pPr algn="ctr"/>
+                  <a:r>
+                    <a:rPr lang="ru-RU">
+                      <a:solidFill>
+                        <a:srgbClr val="0C5753"/>
+                      </a:solidFill>
+                      <a:latin typeface="Courier New" panose="02070309020205020404" pitchFamily="49" charset="0"/>
+                      <a:cs typeface="Courier New" panose="02070309020205020404" pitchFamily="49" charset="0"/>
+                    </a:rPr>
+                    <a:t>-</a:t>
+                  </a:r>
+                  <a:r>
+                    <a:rPr lang="en-US">
+                      <a:solidFill>
+                        <a:srgbClr val="0C5753"/>
+                      </a:solidFill>
+                      <a:latin typeface="Courier New" panose="02070309020205020404" pitchFamily="49" charset="0"/>
+                      <a:cs typeface="Courier New" panose="02070309020205020404" pitchFamily="49" charset="0"/>
+                    </a:rPr>
+                    <a:t>snp_pi</a:t>
+                  </a:r>
+                </a:p>
+              </p:txBody>
+            </p:sp>
+          </mc:Choice>
+          <mc:Fallback>
+            <p:sp>
+              <p:nvSpPr>
+                <p:cNvPr id="35" name="Rounded Rectangle 34">
+                  <a:extLst>
+                    <a:ext uri="{FF2B5EF4-FFF2-40B4-BE49-F238E27FC236}">
+                      <a16:creationId xmlns:a16="http://schemas.microsoft.com/office/drawing/2014/main" id="{36D7D627-C4A2-68B8-AAEC-1800057753AB}"/>
+                    </a:ext>
+                  </a:extLst>
+                </p:cNvPr>
+                <p:cNvSpPr>
+                  <a:spLocks noRot="1" noChangeAspect="1" noMove="1" noResize="1" noEditPoints="1" noAdjustHandles="1" noChangeArrowheads="1" noChangeShapeType="1" noTextEdit="1"/>
+                </p:cNvSpPr>
+                <p:nvPr/>
+              </p:nvSpPr>
+              <p:spPr>
+                <a:xfrm>
+                  <a:off x="1195081" y="5182148"/>
+                  <a:ext cx="1645920" cy="777240"/>
+                </a:xfrm>
+                <a:prstGeom prst="roundRect">
+                  <a:avLst/>
+                </a:prstGeom>
+                <a:blipFill>
+                  <a:blip r:embed="rId2"/>
+                  <a:stretch>
+                    <a:fillRect b="-1538"/>
+                  </a:stretch>
+                </a:blipFill>
+                <a:ln w="38100">
+                  <a:solidFill>
+                    <a:srgbClr val="0C5753"/>
+                  </a:solidFill>
+                  <a:headEnd type="triangle"/>
+                  <a:tailEnd type="none"/>
+                </a:ln>
+              </p:spPr>
+              <p:txBody>
+                <a:bodyPr/>
+                <a:lstStyle/>
+                <a:p>
+                  <a:r>
+                    <a:rPr lang="en-US">
+                      <a:noFill/>
+                    </a:rPr>
+                    <a:t> </a:t>
+                  </a:r>
+                </a:p>
+              </p:txBody>
+            </p:sp>
+          </mc:Fallback>
+        </mc:AlternateContent>
+        <p:sp>
+          <p:nvSpPr>
+            <p:cNvPr id="36" name="Rounded Rectangle 35">
+              <a:extLst>
+                <a:ext uri="{FF2B5EF4-FFF2-40B4-BE49-F238E27FC236}">
+                  <a16:creationId xmlns:a16="http://schemas.microsoft.com/office/drawing/2014/main" id="{C9AD6E3F-E2D2-DA5B-68E7-FD1268B123F8}"/>
+                </a:ext>
+              </a:extLst>
+            </p:cNvPr>
+            <p:cNvSpPr/>
+            <p:nvPr/>
+          </p:nvSpPr>
+          <p:spPr>
+            <a:xfrm>
+              <a:off x="3935541" y="5182148"/>
+              <a:ext cx="2011680" cy="777240"/>
+            </a:xfrm>
+            <a:prstGeom prst="roundRect">
+              <a:avLst/>
+            </a:prstGeom>
+            <a:solidFill>
+              <a:srgbClr val="0C5753">
+                <a:alpha val="20000"/>
+              </a:srgbClr>
+            </a:solidFill>
+            <a:ln w="38100">
+              <a:solidFill>
+                <a:srgbClr val="0C5753"/>
+              </a:solidFill>
+              <a:headEnd type="triangle"/>
+              <a:tailEnd type="none"/>
+            </a:ln>
+          </p:spPr>
+          <p:style>
+            <a:lnRef idx="2">
+              <a:schemeClr val="accent1">
+                <a:shade val="15000"/>
+              </a:schemeClr>
+            </a:lnRef>
+            <a:fillRef idx="1">
+              <a:schemeClr val="accent1"/>
+            </a:fillRef>
+            <a:effectRef idx="0">
+              <a:schemeClr val="accent1"/>
+            </a:effectRef>
+            <a:fontRef idx="minor">
+              <a:schemeClr val="lt1"/>
+            </a:fontRef>
+          </p:style>
+          <p:txBody>
+            <a:bodyPr rtlCol="0" anchor="ctr"/>
+            <a:lstStyle/>
+            <a:p>
+              <a:pPr algn="ctr"/>
+              <a:r>
+                <a:rPr lang="en-US">
+                  <a:solidFill>
+                    <a:srgbClr val="0C5753"/>
+                  </a:solidFill>
+                </a:rPr>
+                <a:t>SV Families</a:t>
+              </a:r>
+            </a:p>
+            <a:p>
+              <a:pPr algn="ctr"/>
+              <a:r>
+                <a:rPr lang="ru-RU">
+                  <a:solidFill>
+                    <a:srgbClr val="0C5753"/>
+                  </a:solidFill>
+                  <a:latin typeface="Courier New" panose="02070309020205020404" pitchFamily="49" charset="0"/>
+                  <a:cs typeface="Courier New" panose="02070309020205020404" pitchFamily="49" charset="0"/>
+                </a:rPr>
+                <a:t>-</a:t>
+              </a:r>
+              <a:r>
+                <a:rPr lang="en-US">
+                  <a:solidFill>
+                    <a:srgbClr val="0C5753"/>
+                  </a:solidFill>
+                  <a:latin typeface="Courier New" panose="02070309020205020404" pitchFamily="49" charset="0"/>
+                  <a:cs typeface="Courier New" panose="02070309020205020404" pitchFamily="49" charset="0"/>
+                </a:rPr>
+                <a:t>sv_family</a:t>
+              </a:r>
+            </a:p>
+          </p:txBody>
+        </p:sp>
+        <p:sp>
+          <p:nvSpPr>
+            <p:cNvPr id="37" name="Rounded Rectangle 36">
+              <a:extLst>
+                <a:ext uri="{FF2B5EF4-FFF2-40B4-BE49-F238E27FC236}">
+                  <a16:creationId xmlns:a16="http://schemas.microsoft.com/office/drawing/2014/main" id="{14B81E48-7BF8-6A30-AD80-4CF05473A8DD}"/>
+                </a:ext>
+              </a:extLst>
+            </p:cNvPr>
+            <p:cNvSpPr/>
+            <p:nvPr/>
+          </p:nvSpPr>
+          <p:spPr>
+            <a:xfrm>
+              <a:off x="6526530" y="5182148"/>
+              <a:ext cx="2011680" cy="777240"/>
+            </a:xfrm>
+            <a:prstGeom prst="roundRect">
+              <a:avLst/>
+            </a:prstGeom>
+            <a:solidFill>
+              <a:srgbClr val="0C5753">
+                <a:alpha val="20000"/>
+              </a:srgbClr>
+            </a:solidFill>
+            <a:ln w="38100">
+              <a:solidFill>
+                <a:srgbClr val="0C5753"/>
+              </a:solidFill>
+              <a:headEnd type="triangle"/>
+              <a:tailEnd type="none"/>
+            </a:ln>
+          </p:spPr>
+          <p:style>
+            <a:lnRef idx="2">
+              <a:schemeClr val="accent1">
+                <a:shade val="15000"/>
+              </a:schemeClr>
+            </a:lnRef>
+            <a:fillRef idx="1">
+              <a:schemeClr val="accent1"/>
+            </a:fillRef>
+            <a:effectRef idx="0">
+              <a:schemeClr val="accent1"/>
+            </a:effectRef>
+            <a:fontRef idx="minor">
+              <a:schemeClr val="lt1"/>
+            </a:fontRef>
+          </p:style>
+          <p:txBody>
+            <a:bodyPr rtlCol="0" anchor="ctr"/>
+            <a:lstStyle/>
+            <a:p>
+              <a:pPr algn="ctr"/>
+              <a:r>
+                <a:rPr lang="en-US">
+                  <a:solidFill>
+                    <a:srgbClr val="0C5753"/>
+                  </a:solidFill>
+                </a:rPr>
+                <a:t>ORFs in SVs</a:t>
+              </a:r>
+            </a:p>
+            <a:p>
+              <a:pPr algn="ctr"/>
+              <a:r>
+                <a:rPr lang="ru-RU">
+                  <a:solidFill>
+                    <a:srgbClr val="0C5753"/>
+                  </a:solidFill>
+                  <a:latin typeface="Courier New" panose="02070309020205020404" pitchFamily="49" charset="0"/>
+                  <a:cs typeface="Courier New" panose="02070309020205020404" pitchFamily="49" charset="0"/>
+                </a:rPr>
+                <a:t>-</a:t>
+              </a:r>
+              <a:r>
+                <a:rPr lang="en-US">
+                  <a:solidFill>
+                    <a:srgbClr val="0C5753"/>
+                  </a:solidFill>
+                  <a:latin typeface="Courier New" panose="02070309020205020404" pitchFamily="49" charset="0"/>
+                  <a:cs typeface="Courier New" panose="02070309020205020404" pitchFamily="49" charset="0"/>
+                </a:rPr>
+                <a:t>sv_orf</a:t>
+              </a:r>
+            </a:p>
+          </p:txBody>
+        </p:sp>
+        <p:sp>
+          <p:nvSpPr>
+            <p:cNvPr id="38" name="Rounded Rectangle 37">
+              <a:extLst>
+                <a:ext uri="{FF2B5EF4-FFF2-40B4-BE49-F238E27FC236}">
+                  <a16:creationId xmlns:a16="http://schemas.microsoft.com/office/drawing/2014/main" id="{A9F1A3F7-E366-348F-3478-2335AFE419BD}"/>
+                </a:ext>
+              </a:extLst>
+            </p:cNvPr>
+            <p:cNvSpPr/>
+            <p:nvPr/>
+          </p:nvSpPr>
+          <p:spPr>
+            <a:xfrm>
+              <a:off x="7512068" y="3677604"/>
+              <a:ext cx="2651760" cy="1219299"/>
+            </a:xfrm>
+            <a:prstGeom prst="roundRect">
+              <a:avLst/>
+            </a:prstGeom>
+            <a:solidFill>
+              <a:srgbClr val="0C5753">
+                <a:alpha val="20000"/>
+              </a:srgbClr>
+            </a:solidFill>
+            <a:ln w="38100">
+              <a:solidFill>
+                <a:srgbClr val="0C5753"/>
+              </a:solidFill>
+              <a:headEnd type="triangle"/>
+              <a:tailEnd type="none"/>
+            </a:ln>
+          </p:spPr>
+          <p:style>
+            <a:lnRef idx="2">
+              <a:schemeClr val="accent1">
+                <a:shade val="15000"/>
+              </a:schemeClr>
+            </a:lnRef>
+            <a:fillRef idx="1">
+              <a:schemeClr val="accent1"/>
+            </a:fillRef>
+            <a:effectRef idx="0">
+              <a:schemeClr val="accent1"/>
+            </a:effectRef>
+            <a:fontRef idx="minor">
+              <a:schemeClr val="lt1"/>
+            </a:fontRef>
+          </p:style>
+          <p:txBody>
+            <a:bodyPr rtlCol="0" anchor="ctr"/>
+            <a:lstStyle/>
+            <a:p>
+              <a:pPr algn="ctr"/>
+              <a:r>
+                <a:rPr lang="en-US">
+                  <a:solidFill>
+                    <a:srgbClr val="0C5753"/>
+                  </a:solidFill>
+                </a:rPr>
+                <a:t>Compare SVs with other Sequences</a:t>
+              </a:r>
+            </a:p>
+            <a:p>
+              <a:pPr algn="ctr"/>
+              <a:r>
+                <a:rPr lang="en-US">
+                  <a:solidFill>
+                    <a:srgbClr val="0C5753"/>
+                  </a:solidFill>
+                  <a:latin typeface="Courier New" panose="02070309020205020404" pitchFamily="49" charset="0"/>
+                  <a:cs typeface="Courier New" panose="02070309020205020404" pitchFamily="49" charset="0"/>
+                </a:rPr>
+                <a:t>-sv_sim &lt;file&gt;</a:t>
+              </a:r>
+            </a:p>
+          </p:txBody>
+        </p:sp>
+        <p:cxnSp>
+          <p:nvCxnSpPr>
+            <p:cNvPr id="39" name="Straight Arrow Connector 38">
+              <a:extLst>
+                <a:ext uri="{FF2B5EF4-FFF2-40B4-BE49-F238E27FC236}">
+                  <a16:creationId xmlns:a16="http://schemas.microsoft.com/office/drawing/2014/main" id="{E53C5D77-57AF-0B48-1FD1-C32F6B66B19F}"/>
+                </a:ext>
+              </a:extLst>
+            </p:cNvPr>
+            <p:cNvCxnSpPr>
+              <a:cxnSpLocks/>
+            </p:cNvCxnSpPr>
+            <p:nvPr/>
+          </p:nvCxnSpPr>
+          <p:spPr>
+            <a:xfrm flipH="1">
+              <a:off x="2076208" y="4787000"/>
+              <a:ext cx="182880" cy="320040"/>
+            </a:xfrm>
+            <a:prstGeom prst="straightConnector1">
+              <a:avLst/>
+            </a:prstGeom>
+            <a:ln w="38100">
+              <a:solidFill>
+                <a:srgbClr val="0C5753"/>
+              </a:solidFill>
+              <a:headEnd type="triangle"/>
+              <a:tailEnd type="none"/>
+            </a:ln>
+          </p:spPr>
+          <p:style>
+            <a:lnRef idx="2">
+              <a:schemeClr val="accent1"/>
+            </a:lnRef>
+            <a:fillRef idx="0">
+              <a:schemeClr val="accent1"/>
+            </a:fillRef>
+            <a:effectRef idx="1">
+              <a:schemeClr val="accent1"/>
+            </a:effectRef>
+            <a:fontRef idx="minor">
+              <a:schemeClr val="tx1"/>
+            </a:fontRef>
+          </p:style>
+        </p:cxnSp>
+        <p:cxnSp>
+          <p:nvCxnSpPr>
+            <p:cNvPr id="40" name="Straight Arrow Connector 39">
+              <a:extLst>
+                <a:ext uri="{FF2B5EF4-FFF2-40B4-BE49-F238E27FC236}">
+                  <a16:creationId xmlns:a16="http://schemas.microsoft.com/office/drawing/2014/main" id="{41DE50A0-2FDE-7A78-DDFC-D2E7FFB2E511}"/>
+                </a:ext>
+              </a:extLst>
+            </p:cNvPr>
+            <p:cNvCxnSpPr>
+              <a:cxnSpLocks/>
+            </p:cNvCxnSpPr>
+            <p:nvPr/>
+          </p:nvCxnSpPr>
+          <p:spPr>
+            <a:xfrm flipH="1">
+              <a:off x="5186711" y="4760678"/>
+              <a:ext cx="182880" cy="320040"/>
+            </a:xfrm>
+            <a:prstGeom prst="straightConnector1">
+              <a:avLst/>
+            </a:prstGeom>
+            <a:ln w="38100">
+              <a:solidFill>
+                <a:srgbClr val="0C5753"/>
+              </a:solidFill>
+              <a:headEnd type="triangle"/>
+              <a:tailEnd type="none"/>
+            </a:ln>
+          </p:spPr>
+          <p:style>
+            <a:lnRef idx="2">
+              <a:schemeClr val="accent1"/>
+            </a:lnRef>
+            <a:fillRef idx="0">
+              <a:schemeClr val="accent1"/>
+            </a:fillRef>
+            <a:effectRef idx="1">
+              <a:schemeClr val="accent1"/>
+            </a:effectRef>
+            <a:fontRef idx="minor">
+              <a:schemeClr val="tx1"/>
+            </a:fontRef>
+          </p:style>
+        </p:cxnSp>
+        <p:cxnSp>
+          <p:nvCxnSpPr>
+            <p:cNvPr id="41" name="Straight Arrow Connector 40">
+              <a:extLst>
+                <a:ext uri="{FF2B5EF4-FFF2-40B4-BE49-F238E27FC236}">
+                  <a16:creationId xmlns:a16="http://schemas.microsoft.com/office/drawing/2014/main" id="{B1438C26-CBC2-C58B-1E7F-A1BB5019063A}"/>
+                </a:ext>
+              </a:extLst>
+            </p:cNvPr>
+            <p:cNvCxnSpPr>
+              <a:cxnSpLocks/>
+            </p:cNvCxnSpPr>
+            <p:nvPr/>
+          </p:nvCxnSpPr>
+          <p:spPr>
+            <a:xfrm>
+              <a:off x="6740760" y="4752822"/>
+              <a:ext cx="182880" cy="320040"/>
+            </a:xfrm>
+            <a:prstGeom prst="straightConnector1">
+              <a:avLst/>
+            </a:prstGeom>
+            <a:ln w="38100">
+              <a:solidFill>
+                <a:srgbClr val="0C5753"/>
+              </a:solidFill>
+              <a:headEnd type="triangle"/>
+              <a:tailEnd type="none"/>
+            </a:ln>
+          </p:spPr>
+          <p:style>
+            <a:lnRef idx="2">
+              <a:schemeClr val="accent1"/>
+            </a:lnRef>
+            <a:fillRef idx="0">
+              <a:schemeClr val="accent1"/>
+            </a:fillRef>
+            <a:effectRef idx="1">
+              <a:schemeClr val="accent1"/>
+            </a:effectRef>
+            <a:fontRef idx="minor">
+              <a:schemeClr val="tx1"/>
+            </a:fontRef>
+          </p:style>
+        </p:cxnSp>
+        <p:cxnSp>
+          <p:nvCxnSpPr>
+            <p:cNvPr id="42" name="Straight Arrow Connector 41">
+              <a:extLst>
+                <a:ext uri="{FF2B5EF4-FFF2-40B4-BE49-F238E27FC236}">
+                  <a16:creationId xmlns:a16="http://schemas.microsoft.com/office/drawing/2014/main" id="{63D98C4C-FAF2-957D-5AE9-804259DE462F}"/>
+                </a:ext>
+              </a:extLst>
+            </p:cNvPr>
+            <p:cNvCxnSpPr>
+              <a:cxnSpLocks/>
+            </p:cNvCxnSpPr>
+            <p:nvPr/>
+          </p:nvCxnSpPr>
+          <p:spPr>
+            <a:xfrm>
+              <a:off x="6984393" y="4287254"/>
+              <a:ext cx="445891" cy="0"/>
+            </a:xfrm>
+            <a:prstGeom prst="straightConnector1">
+              <a:avLst/>
+            </a:prstGeom>
+            <a:ln w="38100">
+              <a:solidFill>
+                <a:srgbClr val="0C5753"/>
+              </a:solidFill>
+              <a:headEnd type="triangle"/>
+              <a:tailEnd type="none"/>
+            </a:ln>
+          </p:spPr>
+          <p:style>
+            <a:lnRef idx="2">
+              <a:schemeClr val="accent1"/>
+            </a:lnRef>
+            <a:fillRef idx="0">
+              <a:schemeClr val="accent1"/>
+            </a:fillRef>
+            <a:effectRef idx="1">
+              <a:schemeClr val="accent1"/>
+            </a:effectRef>
+            <a:fontRef idx="minor">
+              <a:schemeClr val="tx1"/>
+            </a:fontRef>
+          </p:style>
+        </p:cxnSp>
+        <p:cxnSp>
+          <p:nvCxnSpPr>
+            <p:cNvPr id="44" name="Straight Arrow Connector 43">
+              <a:extLst>
+                <a:ext uri="{FF2B5EF4-FFF2-40B4-BE49-F238E27FC236}">
+                  <a16:creationId xmlns:a16="http://schemas.microsoft.com/office/drawing/2014/main" id="{6877ED52-7D53-3705-705E-DA5A5432FBDD}"/>
+                </a:ext>
+              </a:extLst>
+            </p:cNvPr>
+            <p:cNvCxnSpPr>
+              <a:cxnSpLocks/>
+            </p:cNvCxnSpPr>
+            <p:nvPr/>
+          </p:nvCxnSpPr>
+          <p:spPr>
+            <a:xfrm>
+              <a:off x="6892169" y="855337"/>
+              <a:ext cx="182880" cy="320040"/>
+            </a:xfrm>
+            <a:prstGeom prst="straightConnector1">
+              <a:avLst/>
+            </a:prstGeom>
+            <a:ln w="38100">
+              <a:solidFill>
+                <a:srgbClr val="0C5753"/>
+              </a:solidFill>
+              <a:headEnd type="triangle"/>
+              <a:tailEnd type="none"/>
+            </a:ln>
+          </p:spPr>
+          <p:style>
+            <a:lnRef idx="2">
+              <a:schemeClr val="accent1"/>
+            </a:lnRef>
+            <a:fillRef idx="0">
+              <a:schemeClr val="accent1"/>
+            </a:fillRef>
+            <a:effectRef idx="1">
+              <a:schemeClr val="accent1"/>
+            </a:effectRef>
+            <a:fontRef idx="minor">
+              <a:schemeClr val="tx1"/>
+            </a:fontRef>
+          </p:style>
+        </p:cxnSp>
+        <p:sp>
+          <p:nvSpPr>
+            <p:cNvPr id="2" name="Left Bracket 1">
+              <a:extLst>
+                <a:ext uri="{FF2B5EF4-FFF2-40B4-BE49-F238E27FC236}">
+                  <a16:creationId xmlns:a16="http://schemas.microsoft.com/office/drawing/2014/main" id="{503280E7-E92E-5376-9850-D09C3B9C605A}"/>
+                </a:ext>
+              </a:extLst>
+            </p:cNvPr>
+            <p:cNvSpPr/>
+            <p:nvPr/>
+          </p:nvSpPr>
+          <p:spPr>
+            <a:xfrm>
+              <a:off x="2400299" y="1321298"/>
+              <a:ext cx="173343" cy="2064190"/>
+            </a:xfrm>
+            <a:prstGeom prst="leftBracket">
+              <a:avLst>
+                <a:gd name="adj" fmla="val 137471"/>
+              </a:avLst>
+            </a:prstGeom>
+            <a:ln w="19050">
+              <a:solidFill>
+                <a:schemeClr val="bg1">
+                  <a:lumMod val="75000"/>
+                </a:schemeClr>
+              </a:solidFill>
+            </a:ln>
+          </p:spPr>
+          <p:style>
+            <a:lnRef idx="2">
+              <a:schemeClr val="accent1"/>
+            </a:lnRef>
+            <a:fillRef idx="0">
+              <a:schemeClr val="accent1"/>
+            </a:fillRef>
+            <a:effectRef idx="1">
+              <a:schemeClr val="accent1"/>
+            </a:effectRef>
+            <a:fontRef idx="minor">
+              <a:schemeClr val="tx1"/>
+            </a:fontRef>
+          </p:style>
+          <p:txBody>
+            <a:bodyPr rtlCol="0" anchor="ctr"/>
+            <a:lstStyle/>
+            <a:p>
+              <a:pPr algn="ctr"/>
+              <a:endParaRPr lang="en-US"/>
+            </a:p>
+          </p:txBody>
+        </p:sp>
+        <p:sp>
+          <p:nvSpPr>
+            <p:cNvPr id="8" name="TextBox 7">
+              <a:extLst>
+                <a:ext uri="{FF2B5EF4-FFF2-40B4-BE49-F238E27FC236}">
+                  <a16:creationId xmlns:a16="http://schemas.microsoft.com/office/drawing/2014/main" id="{26EAEF5E-CF40-776A-EC53-1BECA60F5F68}"/>
+                </a:ext>
+              </a:extLst>
+            </p:cNvPr>
+            <p:cNvSpPr txBox="1"/>
+            <p:nvPr/>
+          </p:nvSpPr>
+          <p:spPr>
+            <a:xfrm>
+              <a:off x="2013935" y="2164270"/>
+              <a:ext cx="322524" cy="369332"/>
+            </a:xfrm>
+            <a:prstGeom prst="rect">
+              <a:avLst/>
+            </a:prstGeom>
+            <a:noFill/>
+          </p:spPr>
+          <p:txBody>
+            <a:bodyPr wrap="none" rtlCol="0">
+              <a:spAutoFit/>
+            </a:bodyPr>
+            <a:lstStyle/>
+            <a:p>
+              <a:r>
+                <a:rPr lang="en-US" b="1">
+                  <a:solidFill>
+                    <a:schemeClr val="bg1">
+                      <a:lumMod val="65000"/>
+                    </a:schemeClr>
+                  </a:solidFill>
+                  <a:latin typeface="Courier New" panose="02070309020205020404" pitchFamily="49" charset="0"/>
+                  <a:cs typeface="Courier New" panose="02070309020205020404" pitchFamily="49" charset="0"/>
+                </a:rPr>
+                <a:t>I</a:t>
+              </a:r>
+            </a:p>
+          </p:txBody>
+        </p:sp>
+        <p:sp>
+          <p:nvSpPr>
+            <p:cNvPr id="10" name="Left Bracket 9">
+              <a:extLst>
+                <a:ext uri="{FF2B5EF4-FFF2-40B4-BE49-F238E27FC236}">
+                  <a16:creationId xmlns:a16="http://schemas.microsoft.com/office/drawing/2014/main" id="{B0D32B97-F955-7551-5894-A6A0EB2768CC}"/>
+                </a:ext>
+              </a:extLst>
+            </p:cNvPr>
+            <p:cNvSpPr/>
+            <p:nvPr/>
+          </p:nvSpPr>
+          <p:spPr>
+            <a:xfrm>
+              <a:off x="939954" y="3895198"/>
+              <a:ext cx="173343" cy="2064190"/>
+            </a:xfrm>
+            <a:prstGeom prst="leftBracket">
+              <a:avLst>
+                <a:gd name="adj" fmla="val 137471"/>
+              </a:avLst>
+            </a:prstGeom>
+            <a:ln w="19050">
+              <a:solidFill>
+                <a:schemeClr val="bg1">
+                  <a:lumMod val="75000"/>
+                </a:schemeClr>
+              </a:solidFill>
+            </a:ln>
+          </p:spPr>
+          <p:style>
+            <a:lnRef idx="2">
+              <a:schemeClr val="accent1"/>
+            </a:lnRef>
+            <a:fillRef idx="0">
+              <a:schemeClr val="accent1"/>
+            </a:fillRef>
+            <a:effectRef idx="1">
+              <a:schemeClr val="accent1"/>
+            </a:effectRef>
+            <a:fontRef idx="minor">
+              <a:schemeClr val="tx1"/>
+            </a:fontRef>
+          </p:style>
+          <p:txBody>
+            <a:bodyPr rtlCol="0" anchor="ctr"/>
+            <a:lstStyle/>
+            <a:p>
+              <a:pPr algn="ctr"/>
+              <a:endParaRPr lang="en-US"/>
+            </a:p>
+          </p:txBody>
+        </p:sp>
+        <p:sp>
+          <p:nvSpPr>
+            <p:cNvPr id="11" name="TextBox 10">
+              <a:extLst>
+                <a:ext uri="{FF2B5EF4-FFF2-40B4-BE49-F238E27FC236}">
+                  <a16:creationId xmlns:a16="http://schemas.microsoft.com/office/drawing/2014/main" id="{8C294F91-1FEB-411C-3457-5EAC9DDA5D8E}"/>
+                </a:ext>
+              </a:extLst>
+            </p:cNvPr>
+            <p:cNvSpPr txBox="1"/>
+            <p:nvPr/>
+          </p:nvSpPr>
+          <p:spPr>
+            <a:xfrm>
+              <a:off x="522290" y="4728176"/>
+              <a:ext cx="460382" cy="369332"/>
+            </a:xfrm>
+            <a:prstGeom prst="rect">
+              <a:avLst/>
+            </a:prstGeom>
+            <a:noFill/>
+          </p:spPr>
+          <p:txBody>
+            <a:bodyPr wrap="none" rtlCol="0">
+              <a:spAutoFit/>
+            </a:bodyPr>
+            <a:lstStyle/>
+            <a:p>
+              <a:pPr algn="ctr"/>
+              <a:r>
+                <a:rPr lang="en-US" b="1">
+                  <a:solidFill>
+                    <a:schemeClr val="bg1">
+                      <a:lumMod val="65000"/>
+                    </a:schemeClr>
+                  </a:solidFill>
+                  <a:latin typeface="Courier New" panose="02070309020205020404" pitchFamily="49" charset="0"/>
+                  <a:cs typeface="Courier New" panose="02070309020205020404" pitchFamily="49" charset="0"/>
+                </a:rPr>
+                <a:t>II</a:t>
+              </a:r>
+            </a:p>
+          </p:txBody>
+        </p:sp>
+        <p:sp>
+          <p:nvSpPr>
+            <p:cNvPr id="12" name="Left Bracket 11">
+              <a:extLst>
+                <a:ext uri="{FF2B5EF4-FFF2-40B4-BE49-F238E27FC236}">
+                  <a16:creationId xmlns:a16="http://schemas.microsoft.com/office/drawing/2014/main" id="{92302FAA-D0C8-6A5C-7B18-9806B965A385}"/>
+                </a:ext>
+              </a:extLst>
+            </p:cNvPr>
+            <p:cNvSpPr/>
+            <p:nvPr/>
+          </p:nvSpPr>
+          <p:spPr>
+            <a:xfrm flipH="1">
+              <a:off x="10269145" y="3677604"/>
+              <a:ext cx="173343" cy="2281784"/>
+            </a:xfrm>
+            <a:prstGeom prst="leftBracket">
+              <a:avLst>
+                <a:gd name="adj" fmla="val 137471"/>
+              </a:avLst>
+            </a:prstGeom>
+            <a:ln w="19050">
+              <a:solidFill>
+                <a:schemeClr val="bg1">
+                  <a:lumMod val="75000"/>
+                </a:schemeClr>
+              </a:solidFill>
+            </a:ln>
+          </p:spPr>
+          <p:style>
+            <a:lnRef idx="2">
+              <a:schemeClr val="accent1"/>
+            </a:lnRef>
+            <a:fillRef idx="0">
+              <a:schemeClr val="accent1"/>
+            </a:fillRef>
+            <a:effectRef idx="1">
+              <a:schemeClr val="accent1"/>
+            </a:effectRef>
+            <a:fontRef idx="minor">
+              <a:schemeClr val="tx1"/>
+            </a:fontRef>
+          </p:style>
+          <p:txBody>
+            <a:bodyPr rtlCol="0" anchor="ctr"/>
+            <a:lstStyle/>
+            <a:p>
+              <a:pPr algn="ctr"/>
+              <a:endParaRPr lang="en-US"/>
+            </a:p>
+          </p:txBody>
+        </p:sp>
+        <p:sp>
+          <p:nvSpPr>
+            <p:cNvPr id="13" name="TextBox 12">
+              <a:extLst>
+                <a:ext uri="{FF2B5EF4-FFF2-40B4-BE49-F238E27FC236}">
+                  <a16:creationId xmlns:a16="http://schemas.microsoft.com/office/drawing/2014/main" id="{308186B9-1D23-0641-EA59-18E9BB2CC14A}"/>
+                </a:ext>
+              </a:extLst>
+            </p:cNvPr>
+            <p:cNvSpPr txBox="1"/>
+            <p:nvPr/>
+          </p:nvSpPr>
+          <p:spPr>
+            <a:xfrm flipH="1">
+              <a:off x="10445138" y="4617856"/>
+              <a:ext cx="598241" cy="369332"/>
+            </a:xfrm>
+            <a:prstGeom prst="rect">
+              <a:avLst/>
+            </a:prstGeom>
+            <a:noFill/>
+          </p:spPr>
+          <p:txBody>
+            <a:bodyPr wrap="none" rtlCol="0">
+              <a:spAutoFit/>
+            </a:bodyPr>
+            <a:lstStyle/>
+            <a:p>
+              <a:pPr algn="ctr"/>
+              <a:r>
+                <a:rPr lang="en-US" b="1">
+                  <a:solidFill>
+                    <a:schemeClr val="bg1">
+                      <a:lumMod val="65000"/>
+                    </a:schemeClr>
+                  </a:solidFill>
+                  <a:latin typeface="Courier New" panose="02070309020205020404" pitchFamily="49" charset="0"/>
+                  <a:cs typeface="Courier New" panose="02070309020205020404" pitchFamily="49" charset="0"/>
+                </a:rPr>
+                <a:t>III</a:t>
+              </a:r>
+            </a:p>
+          </p:txBody>
+        </p:sp>
+        <p:sp>
+          <p:nvSpPr>
+            <p:cNvPr id="18" name="Left Bracket 17">
+              <a:extLst>
+                <a:ext uri="{FF2B5EF4-FFF2-40B4-BE49-F238E27FC236}">
+                  <a16:creationId xmlns:a16="http://schemas.microsoft.com/office/drawing/2014/main" id="{D29392E5-E2D2-9E6E-CCA0-F44D982A330D}"/>
+                </a:ext>
+              </a:extLst>
+            </p:cNvPr>
+            <p:cNvSpPr/>
+            <p:nvPr/>
+          </p:nvSpPr>
+          <p:spPr>
+            <a:xfrm flipH="1">
+              <a:off x="9585817" y="1321299"/>
+              <a:ext cx="173343" cy="777240"/>
+            </a:xfrm>
+            <a:prstGeom prst="leftBracket">
+              <a:avLst>
+                <a:gd name="adj" fmla="val 137471"/>
+              </a:avLst>
+            </a:prstGeom>
+            <a:ln w="19050">
+              <a:solidFill>
+                <a:schemeClr val="bg1">
+                  <a:lumMod val="75000"/>
+                </a:schemeClr>
+              </a:solidFill>
+            </a:ln>
+          </p:spPr>
+          <p:style>
+            <a:lnRef idx="2">
+              <a:schemeClr val="accent1"/>
+            </a:lnRef>
+            <a:fillRef idx="0">
+              <a:schemeClr val="accent1"/>
+            </a:fillRef>
+            <a:effectRef idx="1">
+              <a:schemeClr val="accent1"/>
+            </a:effectRef>
+            <a:fontRef idx="minor">
+              <a:schemeClr val="tx1"/>
+            </a:fontRef>
+          </p:style>
+          <p:txBody>
+            <a:bodyPr rtlCol="0" anchor="ctr"/>
+            <a:lstStyle/>
+            <a:p>
+              <a:pPr algn="ctr"/>
+              <a:endParaRPr lang="en-US"/>
+            </a:p>
+          </p:txBody>
+        </p:sp>
+        <p:sp>
+          <p:nvSpPr>
+            <p:cNvPr id="19" name="TextBox 18">
+              <a:extLst>
+                <a:ext uri="{FF2B5EF4-FFF2-40B4-BE49-F238E27FC236}">
+                  <a16:creationId xmlns:a16="http://schemas.microsoft.com/office/drawing/2014/main" id="{1893CC59-11F9-A3D4-F96F-F79B6FCC49B1}"/>
+                </a:ext>
+              </a:extLst>
+            </p:cNvPr>
+            <p:cNvSpPr txBox="1"/>
+            <p:nvPr/>
+          </p:nvSpPr>
+          <p:spPr>
+            <a:xfrm flipH="1">
+              <a:off x="9713634" y="1512467"/>
+              <a:ext cx="460382" cy="369332"/>
+            </a:xfrm>
+            <a:prstGeom prst="rect">
+              <a:avLst/>
+            </a:prstGeom>
+            <a:noFill/>
+          </p:spPr>
+          <p:txBody>
+            <a:bodyPr wrap="none" rtlCol="0">
+              <a:spAutoFit/>
+            </a:bodyPr>
+            <a:lstStyle/>
+            <a:p>
+              <a:pPr algn="ctr"/>
+              <a:r>
+                <a:rPr lang="en-US" b="1">
+                  <a:solidFill>
+                    <a:schemeClr val="bg1">
+                      <a:lumMod val="65000"/>
+                    </a:schemeClr>
+                  </a:solidFill>
+                  <a:latin typeface="Courier New" panose="02070309020205020404" pitchFamily="49" charset="0"/>
+                  <a:cs typeface="Courier New" panose="02070309020205020404" pitchFamily="49" charset="0"/>
+                </a:rPr>
+                <a:t>IV</a:t>
+              </a:r>
+            </a:p>
+          </p:txBody>
+        </p:sp>
+      </p:grpSp>
+    </p:spTree>
+    <p:extLst>
+      <p:ext uri="{BB962C8B-B14F-4D97-AF65-F5344CB8AC3E}">
+        <p14:creationId xmlns:p14="http://schemas.microsoft.com/office/powerpoint/2010/main" val="208829241"/>
       </p:ext>
     </p:extLst>
   </p:cSld>
